--- a/lectures/Lecture 2.1 - Files, Serialization, and Data Persistence.pptx
+++ b/lectures/Lecture 2.1 - Files, Serialization, and Data Persistence.pptx
@@ -1332,7 +1332,7 @@
             </a:pPr>
             <a:r>
               <a:rPr lang="en-US"/>
-              <a:t>The core concept that makes everything else make sense.</a:t>
+              <a:t>The concept the rest of the lecture hangs off.</a:t>
             </a:r>
             <a:endParaRPr/>
           </a:p>
@@ -1490,7 +1490,7 @@
             </a:pPr>
             <a:r>
               <a:rPr lang="en-US"/>
-              <a:t>This is the framing that makes JSON and CSV make sense as choices, not just random libraries to memorize. Every format is an answer to 'how do I turn structured data into flat bytes?'</a:t>
+              <a:t>This framing is what turns JSON and CSV from two libraries you memorize into two different answers to the same question, which is 'how do I get structured data into flat bytes and then back out again.'</a:t>
             </a:r>
             <a:endParaRPr/>
           </a:p>
@@ -1648,7 +1648,7 @@
             </a:pPr>
             <a:r>
               <a:rPr lang="en-US"/>
-              <a:t>This is the framing that makes JSON and CSV make sense as choices, not just random libraries to memorize. Every format is an answer to 'how do I turn structured data into flat bytes?'</a:t>
+              <a:t>This framing is what turns JSON and CSV from two libraries you memorize into two different answers to the same question, which is 'how do I get structured data into flat bytes and then back out again.'</a:t>
             </a:r>
             <a:endParaRPr/>
           </a:p>
@@ -1806,7 +1806,7 @@
             </a:pPr>
             <a:r>
               <a:rPr lang="en-US"/>
-              <a:t>This is the framing that makes JSON and CSV make sense as choices, not just random libraries to memorize. Every format is an answer to 'how do I turn structured data into flat bytes?'</a:t>
+              <a:t>This framing is what turns JSON and CSV from two libraries you memorize into two different answers to the same question, which is 'how do I get structured data into flat bytes and then back out again.'</a:t>
             </a:r>
             <a:endParaRPr/>
           </a:p>
@@ -2280,7 +2280,7 @@
             </a:pPr>
             <a:r>
               <a:rPr lang="en-US"/>
-              <a:t>Important gotcha: serialization is not a perfect round-trip. Tuples become lists, datetimes must be strings, sets aren't supported. Students will hit this when they add timestamps to the chat app.</a:t>
+              <a:t>Gotcha worth flagging: serialization doesn't round-trip cleanly. Tuples come back as lists, datetimes have to become strings on the way out, and sets just aren't supported at all...and they'll walk straight into this the week they add timestamps to the chat app.</a:t>
             </a:r>
             <a:endParaRPr/>
           </a:p>
@@ -2438,7 +2438,7 @@
             </a:pPr>
             <a:r>
               <a:rPr lang="en-US"/>
-              <a:t>Important gotcha: serialization is not a perfect round-trip. Tuples become lists, datetimes must be strings, sets aren't supported. Students will hit this when they add timestamps to the chat app.</a:t>
+              <a:t>Gotcha worth flagging: serialization doesn't round-trip cleanly. Tuples come back as lists, datetimes have to become strings on the way out, and sets just aren't supported at all...and they'll walk straight into this the week they add timestamps to the chat app.</a:t>
             </a:r>
             <a:endParaRPr/>
           </a:p>
@@ -4666,7 +4666,7 @@
             </a:pPr>
             <a:r>
               <a:rPr lang="en-US"/>
-              <a:t>Now they understand the mechanisms, so the limitations aren't abstract - they've seen each one.</a:t>
+              <a:t>They've got the mechanisms now, so none of these limitations should land as abstract - they've watched each one happen.</a:t>
             </a:r>
             <a:endParaRPr/>
           </a:p>
@@ -4824,7 +4824,7 @@
             </a:pPr>
             <a:r>
               <a:rPr lang="en-US"/>
-              <a:t>This is the fundamental scaling problem with file-based storage. No random access to structured data - you always pay for the whole file.</a:t>
+              <a:t>This is the scaling problem with file-based storage and it's a hard one, because there's no random access into structured data, so you're paying for the whole file every single time you want two messages out of it.</a:t>
             </a:r>
             <a:endParaRPr/>
           </a:p>
@@ -4982,7 +4982,7 @@
             </a:pPr>
             <a:r>
               <a:rPr lang="en-US"/>
-              <a:t>The key insight: because write means 'replace the whole file,' there's no way to safely do concurrent appends to structured data. Two appends to a plain text file (mode='a') work, but two appends to a JSON structure don't.</a:t>
+              <a:t>Because a write means 'replace the whole file,' there's no safe way to do concurrent appends to structured data. Two appends to a plain text file with mode='a' are fine, and two appends to a JSON structure will happily clobber each other.</a:t>
             </a:r>
             <a:endParaRPr/>
           </a:p>
@@ -5140,7 +5140,7 @@
             </a:pPr>
             <a:r>
               <a:rPr lang="en-US"/>
-              <a:t>The key insight: because write means 'replace the whole file,' there's no way to safely do concurrent appends to structured data. Two appends to a plain text file (mode='a') work, but two appends to a JSON structure don't.</a:t>
+              <a:t>Because a write means 'replace the whole file,' there's no safe way to do concurrent appends to structured data. Two appends to a plain text file with mode='a' are fine, and two appends to a JSON structure will happily clobber each other.</a:t>
             </a:r>
             <a:endParaRPr/>
           </a:p>
@@ -5298,7 +5298,7 @@
             </a:pPr>
             <a:r>
               <a:rPr lang="en-US"/>
-              <a:t>Each of these is something databases solve. The students have now seen the mechanism behind each problem, not just a list of limitations.</a:t>
+              <a:t>Every one of these is something a database solves. And they've watched the mechanism behind each problem happen in front of them, so this shouldn't read as a list of complaints about files.</a:t>
             </a:r>
             <a:endParaRPr/>
           </a:p>
@@ -5484,7 +5484,7 @@
             </a:pPr>
             <a:r>
               <a:rPr lang="en-US"/>
-              <a:t>Let them brainstorm. They'll essentially describe a database. That's the point: databases aren't magic, they're engineering solutions to the exact problems we identified. Segue into 2.2.</a:t>
+              <a:t>Let them brainstorm and they'll end up describing a database without meaning to, which is what I want, because then a database reads as engineering aimed at the exact problems we spent the hour finding. Segue into 2.2.</a:t>
             </a:r>
             <a:endParaRPr/>
           </a:p>
@@ -5642,7 +5642,7 @@
             </a:pPr>
             <a:r>
               <a:rPr lang="en-US"/>
-              <a:t>Quick recap. The throughline: files are simple and useful, but once you understand what's actually happening at the byte level, you can see exactly why and when you need something more powerful.</a:t>
+              <a:t>Quick recap. Files are simple and useful and they'll get you a long way, but once you know what's actually happening down at the byte level you can see exactly when you need something more powerful, and why.</a:t>
             </a:r>
             <a:endParaRPr/>
           </a:p>
@@ -5958,7 +5958,7 @@
             </a:pPr>
             <a:r>
               <a:rPr lang="en-US"/>
-              <a:t>Key insight: files have no inherent structure. All structure is a convention layered on top of bytes. This is why serialization exists.</a:t>
+              <a:t>Files have no structure of their own. Whatever structure you think is in there is a convention somebody layered on top of a pile of bytes, and that's the entire reason serialization has to exist.</a:t>
             </a:r>
             <a:endParaRPr/>
           </a:p>
@@ -6116,7 +6116,7 @@
             </a:pPr>
             <a:r>
               <a:rPr lang="en-US"/>
-              <a:t>File descriptors are a limited resource. On most systems, a process can have ~1024 open. Leak them in a server and you crash. The 'with' statement isn't just style - it's correctness.</a:t>
+              <a:t>File descriptors are a limited resource - a process gets something like 1024 of them on most systems - so if you leak them in a long-running server you'll eventually fall over. That's the actual argument for 'with'. The tidiness argument is a distant second.</a:t>
             </a:r>
             <a:endParaRPr/>
           </a:p>
@@ -6274,7 +6274,7 @@
             </a:pPr>
             <a:r>
               <a:rPr lang="en-US"/>
-              <a:t>Students have been told 'use with' since CS1. Now they know WHY. It's a resource management pattern, not just a style preference.</a:t>
+              <a:t>They've been told 'use with' since CS1 without anyone explaining it, so this is where they find out why. It's resource management, and the tidiness is a side effect.</a:t>
             </a:r>
             <a:endParaRPr/>
           </a:p>
@@ -6432,7 +6432,7 @@
             </a:pPr>
             <a:r>
               <a:rPr lang="en-US"/>
-              <a:t>Students have been told 'use with' since CS1. Now they know WHY. It's a resource management pattern, not just a style preference.</a:t>
+              <a:t>They've been told 'use with' since CS1 without anyone explaining it, so this is where they find out why. It's resource management, and the tidiness is a side effect.</a:t>
             </a:r>
             <a:endParaRPr/>
           </a:p>
@@ -6590,7 +6590,7 @@
             </a:pPr>
             <a:r>
               <a:rPr lang="en-US"/>
-              <a:t>Students have been told 'use with' since CS1. Now they know WHY. It's a resource management pattern, not just a style preference.</a:t>
+              <a:t>They've been told 'use with' since CS1 without anyone explaining it, so this is where they find out why. It's resource management, and the tidiness is a side effect.</a:t>
             </a:r>
             <a:endParaRPr/>
           </a:p>

--- a/lectures/Lecture 2.1 - Files, Serialization, and Data Persistence.pptx
+++ b/lectures/Lecture 2.1 - Files, Serialization, and Data Persistence.pptx
@@ -831,36 +831,9 @@
           </a:bodyPr>
           <a:lstStyle/>
           <a:p>
-            <a:pPr marL="0" lvl="0" indent="0" algn="l" rtl="0">
-              <a:spcBef>
-                <a:spcPts val="0"/>
-              </a:spcBef>
-              <a:spcAft>
-                <a:spcPts val="0"/>
-              </a:spcAft>
-              <a:buNone/>
-            </a:pPr>
-            <a:r>
-              <a:rPr lang="en-US"/>
-              <a:t>Assignment notes: don’t let agent produce spaghetti code, it should make consistent design decisions from call to call, don’t use ORM</a:t>
-            </a:r>
-            <a:endParaRPr/>
-          </a:p>
-          <a:p>
-            <a:pPr marL="0" lvl="0" indent="0" algn="l" rtl="0">
-              <a:spcBef>
-                <a:spcPts val="0"/>
-              </a:spcBef>
-              <a:spcAft>
-                <a:spcPts val="0"/>
-              </a:spcAft>
-              <a:buNone/>
-            </a:pPr>
-            <a:r>
-              <a:rPr lang="en-US"/>
-              <a:t>Today: what's really happening when you read/write data, why serialization exists, and why files eventually break down as a storage mechanism.</a:t>
-            </a:r>
-            <a:endParaRPr/>
+            <a:r>
+              <a:t>Assignment reminders: no spaghetti code, consistent design decisions call to call, no ORM.</a:t>
+            </a:r>
           </a:p>
         </p:txBody>
       </p:sp>
@@ -1005,20 +978,9 @@
           </a:bodyPr>
           <a:lstStyle/>
           <a:p>
-            <a:pPr marL="0" lvl="0" indent="0" algn="l" rtl="0">
-              <a:spcBef>
-                <a:spcPts val="0"/>
-              </a:spcBef>
-              <a:spcAft>
-                <a:spcPts val="0"/>
-              </a:spcAft>
-              <a:buNone/>
-            </a:pPr>
-            <a:r>
-              <a:rPr lang="en-US"/>
-              <a:t>Students should try to predict each output. Key surprise: sys.getsizeof(msg) is much larger than the serialized form, because the in-memory dict has hash tables, pointers, refcounts. The serialized form is just characters.</a:t>
-            </a:r>
-            <a:endParaRPr/>
+            <a:r>
+              <a:t>Have them predict each line before running. Surprise: getsizeof is the big one.</a:t>
+            </a:r>
           </a:p>
         </p:txBody>
       </p:sp>
@@ -1163,20 +1125,9 @@
           </a:bodyPr>
           <a:lstStyle/>
           <a:p>
-            <a:pPr marL="0" lvl="0" indent="0" algn="l" rtl="0">
-              <a:spcBef>
-                <a:spcPts val="0"/>
-              </a:spcBef>
-              <a:spcAft>
-                <a:spcPts val="0"/>
-              </a:spcAft>
-              <a:buNone/>
-            </a:pPr>
-            <a:r>
-              <a:rPr lang="en-US"/>
-              <a:t>184 bytes for a tiny dict! Objects carry a lot of overhead: type pointers, reference counts, hash table buckets. Serialization strips all that away - just the data, in a flat text format. This is why you can't just 'save a dict to a file' directly.</a:t>
-            </a:r>
-            <a:endParaRPr/>
+            <a:r>
+              <a:t>Point: this is why you can't write a dict to disk directly.</a:t>
+            </a:r>
           </a:p>
         </p:txBody>
       </p:sp>
@@ -1320,22 +1271,7 @@
             <a:noAutofit/>
           </a:bodyPr>
           <a:lstStyle/>
-          <a:p>
-            <a:pPr marL="0" lvl="0" indent="0" algn="l" rtl="0">
-              <a:spcBef>
-                <a:spcPts val="0"/>
-              </a:spcBef>
-              <a:spcAft>
-                <a:spcPts val="0"/>
-              </a:spcAft>
-              <a:buNone/>
-            </a:pPr>
-            <a:r>
-              <a:rPr lang="en-US"/>
-              <a:t>The concept the rest of the lecture hangs off.</a:t>
-            </a:r>
-            <a:endParaRPr/>
-          </a:p>
+          <a:p/>
         </p:txBody>
       </p:sp>
       <p:sp>
@@ -1478,22 +1414,7 @@
             <a:noAutofit/>
           </a:bodyPr>
           <a:lstStyle/>
-          <a:p>
-            <a:pPr marL="0" lvl="0" indent="0" algn="l" rtl="0">
-              <a:spcBef>
-                <a:spcPts val="0"/>
-              </a:spcBef>
-              <a:spcAft>
-                <a:spcPts val="0"/>
-              </a:spcAft>
-              <a:buNone/>
-            </a:pPr>
-            <a:r>
-              <a:rPr lang="en-US"/>
-              <a:t>This framing is what turns JSON and CSV from two libraries you memorize into two different answers to the same question, which is 'how do I get structured data into flat bytes and then back out again.'</a:t>
-            </a:r>
-            <a:endParaRPr/>
-          </a:p>
+          <a:p/>
         </p:txBody>
       </p:sp>
       <p:sp>
@@ -1636,22 +1557,7 @@
             <a:noAutofit/>
           </a:bodyPr>
           <a:lstStyle/>
-          <a:p>
-            <a:pPr marL="0" lvl="0" indent="0" algn="l" rtl="0">
-              <a:spcBef>
-                <a:spcPts val="0"/>
-              </a:spcBef>
-              <a:spcAft>
-                <a:spcPts val="0"/>
-              </a:spcAft>
-              <a:buNone/>
-            </a:pPr>
-            <a:r>
-              <a:rPr lang="en-US"/>
-              <a:t>This framing is what turns JSON and CSV from two libraries you memorize into two different answers to the same question, which is 'how do I get structured data into flat bytes and then back out again.'</a:t>
-            </a:r>
-            <a:endParaRPr/>
-          </a:p>
+          <a:p/>
         </p:txBody>
       </p:sp>
       <p:sp>
@@ -1794,22 +1700,7 @@
             <a:noAutofit/>
           </a:bodyPr>
           <a:lstStyle/>
-          <a:p>
-            <a:pPr marL="0" lvl="0" indent="0" algn="l" rtl="0">
-              <a:spcBef>
-                <a:spcPts val="0"/>
-              </a:spcBef>
-              <a:spcAft>
-                <a:spcPts val="0"/>
-              </a:spcAft>
-              <a:buNone/>
-            </a:pPr>
-            <a:r>
-              <a:rPr lang="en-US"/>
-              <a:t>This framing is what turns JSON and CSV from two libraries you memorize into two different answers to the same question, which is 'how do I get structured data into flat bytes and then back out again.'</a:t>
-            </a:r>
-            <a:endParaRPr/>
-          </a:p>
+          <a:p/>
         </p:txBody>
       </p:sp>
       <p:sp>
@@ -1953,20 +1844,9 @@
           </a:bodyPr>
           <a:lstStyle/>
           <a:p>
-            <a:pPr marL="0" lvl="0" indent="0" algn="l" rtl="0">
-              <a:spcBef>
-                <a:spcPts val="0"/>
-              </a:spcBef>
-              <a:spcAft>
-                <a:spcPts val="0"/>
-              </a:spcAft>
-              <a:buNone/>
-            </a:pPr>
-            <a:r>
-              <a:rPr lang="en-US"/>
-              <a:t>JSON is THE format for web APIs. They'll use it constantly for the chat app REST API. Emphasize the symmetry: dump/load, dumps/loads. indent=2 makes it human-readable; without it, it's one long line.</a:t>
-            </a:r>
-            <a:endParaRPr/>
+            <a:r>
+              <a:t>Chat app API uses this constantly. Without indent=2, one long line.</a:t>
+            </a:r>
           </a:p>
         </p:txBody>
       </p:sp>
@@ -2111,20 +1991,9 @@
           </a:bodyPr>
           <a:lstStyle/>
           <a:p>
-            <a:pPr marL="0" lvl="0" indent="0" algn="l" rtl="0">
-              <a:spcBef>
-                <a:spcPts val="0"/>
-              </a:spcBef>
-              <a:spcAft>
-                <a:spcPts val="0"/>
-              </a:spcAft>
-              <a:buNone/>
-            </a:pPr>
-            <a:r>
-              <a:rPr lang="en-US"/>
-              <a:t>DictReader is almost always better than plain reader. newline='' prevents double-spacing on Windows. Don't dwell on CSV - just establish it as the tabular alternative to JSON.</a:t>
-            </a:r>
-            <a:endParaRPr/>
+            <a:r>
+              <a:t>newline='' stops double-spacing on Windows. Keep it short.</a:t>
+            </a:r>
           </a:p>
         </p:txBody>
       </p:sp>
@@ -2269,20 +2138,9 @@
           </a:bodyPr>
           <a:lstStyle/>
           <a:p>
-            <a:pPr marL="0" lvl="0" indent="0" algn="l" rtl="0">
-              <a:spcBef>
-                <a:spcPts val="0"/>
-              </a:spcBef>
-              <a:spcAft>
-                <a:spcPts val="0"/>
-              </a:spcAft>
-              <a:buNone/>
-            </a:pPr>
-            <a:r>
-              <a:rPr lang="en-US"/>
-              <a:t>Gotcha worth flagging: serialization doesn't round-trip cleanly. Tuples come back as lists, datetimes have to become strings on the way out, and sets just aren't supported at all...and they'll walk straight into this the week they add timestamps to the chat app.</a:t>
-            </a:r>
-            <a:endParaRPr/>
+            <a:r>
+              <a:t>Chat app timestamps will hit this.</a:t>
+            </a:r>
           </a:p>
         </p:txBody>
       </p:sp>
@@ -2427,20 +2285,9 @@
           </a:bodyPr>
           <a:lstStyle/>
           <a:p>
-            <a:pPr marL="0" lvl="0" indent="0" algn="l" rtl="0">
-              <a:spcBef>
-                <a:spcPts val="0"/>
-              </a:spcBef>
-              <a:spcAft>
-                <a:spcPts val="0"/>
-              </a:spcAft>
-              <a:buNone/>
-            </a:pPr>
-            <a:r>
-              <a:rPr lang="en-US"/>
-              <a:t>Gotcha worth flagging: serialization doesn't round-trip cleanly. Tuples come back as lists, datetimes have to become strings on the way out, and sets just aren't supported at all...and they'll walk straight into this the week they add timestamps to the chat app.</a:t>
-            </a:r>
-            <a:endParaRPr/>
+            <a:r>
+              <a:t>Chat app timestamps will hit this.</a:t>
+            </a:r>
           </a:p>
         </p:txBody>
       </p:sp>
@@ -2585,20 +2432,9 @@
           </a:bodyPr>
           <a:lstStyle/>
           <a:p>
-            <a:pPr marL="0" lvl="0" indent="0" algn="l" rtl="0">
-              <a:spcBef>
-                <a:spcPts val="0"/>
-              </a:spcBef>
-              <a:spcAft>
-                <a:spcPts val="0"/>
-              </a:spcAft>
-              <a:buNone/>
-            </a:pPr>
-            <a:r>
-              <a:rPr lang="en-US"/>
-              <a:t>Quick orientation so the opening question lands. Most students have seen JSON but may not have a crisp definition. Don't teach the Python API yet - just establish what the format IS.</a:t>
-            </a:r>
-            <a:endParaRPr/>
+            <a:r>
+              <a:t>Format only, no Python API yet.</a:t>
+            </a:r>
           </a:p>
         </p:txBody>
       </p:sp>
@@ -2743,16 +2579,9 @@
           </a:bodyPr>
           <a:lstStyle/>
           <a:p>
-            <a:pPr marL="0" lvl="0" indent="0" algn="l" rtl="0">
-              <a:spcBef>
-                <a:spcPts val="0"/>
-              </a:spcBef>
-              <a:spcAft>
-                <a:spcPts val="0"/>
-              </a:spcAft>
-              <a:buNone/>
-            </a:pPr>
-            <a:endParaRPr/>
+            <a:r>
+              <a:t>Answer: False, `scores` comes back a list.</a:t>
+            </a:r>
           </a:p>
         </p:txBody>
       </p:sp>
@@ -2897,16 +2726,9 @@
           </a:bodyPr>
           <a:lstStyle/>
           <a:p>
-            <a:pPr marL="0" lvl="0" indent="0" algn="l" rtl="0">
-              <a:spcBef>
-                <a:spcPts val="0"/>
-              </a:spcBef>
-              <a:spcAft>
-                <a:spcPts val="0"/>
-              </a:spcAft>
-              <a:buNone/>
-            </a:pPr>
-            <a:endParaRPr/>
+            <a:r>
+              <a:t>Answer: False, `scores` comes back a list.</a:t>
+            </a:r>
           </a:p>
         </p:txBody>
       </p:sp>
@@ -3051,16 +2873,9 @@
           </a:bodyPr>
           <a:lstStyle/>
           <a:p>
-            <a:pPr marL="0" lvl="0" indent="0" algn="l" rtl="0">
-              <a:spcBef>
-                <a:spcPts val="0"/>
-              </a:spcBef>
-              <a:spcAft>
-                <a:spcPts val="0"/>
-              </a:spcAft>
-              <a:buNone/>
-            </a:pPr>
-            <a:endParaRPr/>
+            <a:r>
+              <a:t>Answer: False, `scores` comes back a list.</a:t>
+            </a:r>
           </a:p>
         </p:txBody>
       </p:sp>
@@ -3358,22 +3173,7 @@
             <a:noAutofit/>
           </a:bodyPr>
           <a:lstStyle/>
-          <a:p>
-            <a:pPr marL="0" lvl="0" indent="0" algn="l" rtl="0">
-              <a:spcBef>
-                <a:spcPts val="0"/>
-              </a:spcBef>
-              <a:spcAft>
-                <a:spcPts val="0"/>
-              </a:spcAft>
-              <a:buNone/>
-            </a:pPr>
-            <a:r>
-              <a:rPr lang="en-US"/>
-              <a:t>Now apply everything: build a real file-based chat store.</a:t>
-            </a:r>
-            <a:endParaRPr/>
-          </a:p>
+          <a:p/>
         </p:txBody>
       </p:sp>
       <p:sp>
@@ -3517,20 +3317,9 @@
           </a:bodyPr>
           <a:lstStyle/>
           <a:p>
-            <a:pPr marL="0" lvl="0" indent="0" algn="l" rtl="0">
-              <a:spcBef>
-                <a:spcPts val="0"/>
-              </a:spcBef>
-              <a:spcAft>
-                <a:spcPts val="0"/>
-              </a:spcAft>
-              <a:buNone/>
-            </a:pPr>
-            <a:r>
-              <a:rPr lang="en-US"/>
-              <a:t>Now they see this through the serialization lens: every call to load_messages() deserializes the entire file. Every call to save_message() serializes the entire message list back. pathlib: read_text/write_text are open+read+close in one call.</a:t>
-            </a:r>
-            <a:endParaRPr/>
+            <a:r>
+              <a:t>Whole file in and out on every call. read_text is open+read+close.</a:t>
+            </a:r>
           </a:p>
         </p:txBody>
       </p:sp>
@@ -3675,20 +3464,9 @@
           </a:bodyPr>
           <a:lstStyle/>
           <a:p>
-            <a:pPr marL="0" lvl="0" indent="0" algn="l" rtl="0">
-              <a:spcBef>
-                <a:spcPts val="0"/>
-              </a:spcBef>
-              <a:spcAft>
-                <a:spcPts val="0"/>
-              </a:spcAft>
-              <a:buNone/>
-            </a:pPr>
-            <a:r>
-              <a:rPr lang="en-US"/>
-              <a:t>Now they see this through the serialization lens: every call to load_messages() deserializes the entire file. Every call to save_message() serializes the entire message list back. pathlib: read_text/write_text are open+read+close in one call.</a:t>
-            </a:r>
-            <a:endParaRPr/>
+            <a:r>
+              <a:t>Whole file in and out on every call. read_text is open+read+close.</a:t>
+            </a:r>
           </a:p>
         </p:txBody>
       </p:sp>
@@ -3833,20 +3611,9 @@
           </a:bodyPr>
           <a:lstStyle/>
           <a:p>
-            <a:pPr marL="0" lvl="0" indent="0" algn="l" rtl="0">
-              <a:spcBef>
-                <a:spcPts val="0"/>
-              </a:spcBef>
-              <a:spcAft>
-                <a:spcPts val="0"/>
-              </a:spcAft>
-              <a:buNone/>
-            </a:pPr>
-            <a:r>
-              <a:rPr lang="en-US"/>
-              <a:t>Quick tour - they'll use pathlib throughout the course. read_text/write_text are the main thing; they wrap open+read+close. rglob is recursive, glob is single-directory.</a:t>
-            </a:r>
-            <a:endParaRPr/>
+            <a:r>
+              <a:t>Quick. read_text/write_text are the main thing. glob is single-directory, rglob recursive.</a:t>
+            </a:r>
           </a:p>
         </p:txBody>
       </p:sp>
@@ -3991,20 +3758,9 @@
           </a:bodyPr>
           <a:lstStyle/>
           <a:p>
-            <a:pPr marL="0" lvl="0" indent="0" algn="l" rtl="0">
-              <a:spcBef>
-                <a:spcPts val="0"/>
-              </a:spcBef>
-              <a:spcAft>
-                <a:spcPts val="0"/>
-              </a:spcAft>
-              <a:buNone/>
-            </a:pPr>
-            <a:r>
-              <a:rPr lang="en-US"/>
-              <a:t>Quick tour - they'll use pathlib throughout the course. read_text/write_text are the main thing; they wrap open+read+close. rglob is recursive, glob is single-directory.</a:t>
-            </a:r>
-            <a:endParaRPr/>
+            <a:r>
+              <a:t>Quick. read_text/write_text are the main thing. glob is single-directory, rglob recursive.</a:t>
+            </a:r>
           </a:p>
         </p:txBody>
       </p:sp>
@@ -4149,36 +3905,9 @@
           </a:bodyPr>
           <a:lstStyle/>
           <a:p>
-            <a:pPr marL="0" lvl="0" indent="0" algn="l" rtl="0">
-              <a:spcBef>
-                <a:spcPts val="0"/>
-              </a:spcBef>
-              <a:spcAft>
-                <a:spcPts val="0"/>
-              </a:spcAft>
-              <a:buNone/>
-            </a:pPr>
-            <a:r>
-              <a:rPr lang="en-US"/>
-              <a:t>Have you seen the term “list comprehension”?</a:t>
-            </a:r>
-            <a:endParaRPr/>
-          </a:p>
-          <a:p>
-            <a:pPr marL="0" lvl="0" indent="0" algn="l" rtl="0">
-              <a:spcBef>
-                <a:spcPts val="0"/>
-              </a:spcBef>
-              <a:spcAft>
-                <a:spcPts val="0"/>
-              </a:spcAft>
-              <a:buNone/>
-            </a:pPr>
-            <a:r>
-              <a:rPr lang="en-US"/>
-              <a:t>We deserialized the ENTIRE file just to filter two messages. </a:t>
-            </a:r>
-            <a:endParaRPr/>
+            <a:r>
+              <a:t>Ask: seen 'list comprehension'? Point: whole file deserialized to filter two messages.</a:t>
+            </a:r>
           </a:p>
         </p:txBody>
       </p:sp>
@@ -4323,20 +4052,9 @@
           </a:bodyPr>
           <a:lstStyle/>
           <a:p>
-            <a:pPr marL="0" lvl="0" indent="0" algn="l" rtl="0">
-              <a:spcBef>
-                <a:spcPts val="0"/>
-              </a:spcBef>
-              <a:spcAft>
-                <a:spcPts val="0"/>
-              </a:spcAft>
-              <a:buNone/>
-            </a:pPr>
-            <a:r>
-              <a:rPr lang="en-US"/>
-              <a:t>Most will say 'the file is saved / persistent.' Push: what IS a dict in memory? Pointers, type tags, hash tables, reference counts. A file is just a flat sequence of bytes. How do you get from one to the other?</a:t>
-            </a:r>
-            <a:endParaRPr/>
+            <a:r>
+              <a:t>Expect 'it's saved.' Push: dict is pointers, hash tables, refcounts - file is flat bytes.</a:t>
+            </a:r>
           </a:p>
         </p:txBody>
       </p:sp>
@@ -4481,36 +4199,9 @@
           </a:bodyPr>
           <a:lstStyle/>
           <a:p>
-            <a:pPr marL="0" lvl="0" indent="0" algn="l" rtl="0">
-              <a:spcBef>
-                <a:spcPts val="0"/>
-              </a:spcBef>
-              <a:spcAft>
-                <a:spcPts val="0"/>
-              </a:spcAft>
-              <a:buNone/>
-            </a:pPr>
-            <a:r>
-              <a:rPr lang="en-US"/>
-              <a:t>Have you seen the term “list comprehension”?</a:t>
-            </a:r>
-            <a:endParaRPr/>
-          </a:p>
-          <a:p>
-            <a:pPr marL="0" lvl="0" indent="0" algn="l" rtl="0">
-              <a:spcBef>
-                <a:spcPts val="0"/>
-              </a:spcBef>
-              <a:spcAft>
-                <a:spcPts val="0"/>
-              </a:spcAft>
-              <a:buNone/>
-            </a:pPr>
-            <a:r>
-              <a:rPr lang="en-US"/>
-              <a:t>We deserialized the ENTIRE file just to filter two messages. </a:t>
-            </a:r>
-            <a:endParaRPr/>
+            <a:r>
+              <a:t>Ask: seen 'list comprehension'? Point: whole file deserialized to filter two messages.</a:t>
+            </a:r>
           </a:p>
         </p:txBody>
       </p:sp>
@@ -4654,22 +4345,7 @@
             <a:noAutofit/>
           </a:bodyPr>
           <a:lstStyle/>
-          <a:p>
-            <a:pPr marL="0" lvl="0" indent="0" algn="l" rtl="0">
-              <a:spcBef>
-                <a:spcPts val="0"/>
-              </a:spcBef>
-              <a:spcAft>
-                <a:spcPts val="0"/>
-              </a:spcAft>
-              <a:buNone/>
-            </a:pPr>
-            <a:r>
-              <a:rPr lang="en-US"/>
-              <a:t>They've got the mechanisms now, so none of these limitations should land as abstract - they've watched each one happen.</a:t>
-            </a:r>
-            <a:endParaRPr/>
-          </a:p>
+          <a:p/>
         </p:txBody>
       </p:sp>
       <p:sp>
@@ -4812,22 +4488,7 @@
             <a:noAutofit/>
           </a:bodyPr>
           <a:lstStyle/>
-          <a:p>
-            <a:pPr marL="0" lvl="0" indent="0" algn="l" rtl="0">
-              <a:spcBef>
-                <a:spcPts val="0"/>
-              </a:spcBef>
-              <a:spcAft>
-                <a:spcPts val="0"/>
-              </a:spcAft>
-              <a:buNone/>
-            </a:pPr>
-            <a:r>
-              <a:rPr lang="en-US"/>
-              <a:t>This is the scaling problem with file-based storage and it's a hard one, because there's no random access into structured data, so you're paying for the whole file every single time you want two messages out of it.</a:t>
-            </a:r>
-            <a:endParaRPr/>
-          </a:p>
+          <a:p/>
         </p:txBody>
       </p:sp>
       <p:sp>
@@ -4971,20 +4632,9 @@
           </a:bodyPr>
           <a:lstStyle/>
           <a:p>
-            <a:pPr marL="0" lvl="0" indent="0" algn="l" rtl="0">
-              <a:spcBef>
-                <a:spcPts val="0"/>
-              </a:spcBef>
-              <a:spcAft>
-                <a:spcPts val="0"/>
-              </a:spcAft>
-              <a:buNone/>
-            </a:pPr>
-            <a:r>
-              <a:rPr lang="en-US"/>
-              <a:t>Because a write means 'replace the whole file,' there's no safe way to do concurrent appends to structured data. Two appends to a plain text file with mode='a' are fine, and two appends to a JSON structure will happily clobber each other.</a:t>
-            </a:r>
-            <a:endParaRPr/>
+            <a:r>
+              <a:t>Contrast: mode='a' appends to plain text are fine. JSON needs whole-file rewrite.</a:t>
+            </a:r>
           </a:p>
         </p:txBody>
       </p:sp>
@@ -5129,20 +4779,9 @@
           </a:bodyPr>
           <a:lstStyle/>
           <a:p>
-            <a:pPr marL="0" lvl="0" indent="0" algn="l" rtl="0">
-              <a:spcBef>
-                <a:spcPts val="0"/>
-              </a:spcBef>
-              <a:spcAft>
-                <a:spcPts val="0"/>
-              </a:spcAft>
-              <a:buNone/>
-            </a:pPr>
-            <a:r>
-              <a:rPr lang="en-US"/>
-              <a:t>Because a write means 'replace the whole file,' there's no safe way to do concurrent appends to structured data. Two appends to a plain text file with mode='a' are fine, and two appends to a JSON structure will happily clobber each other.</a:t>
-            </a:r>
-            <a:endParaRPr/>
+            <a:r>
+              <a:t>Contrast: mode='a' appends to plain text are fine. JSON needs whole-file rewrite.</a:t>
+            </a:r>
           </a:p>
         </p:txBody>
       </p:sp>
@@ -5287,20 +4926,9 @@
           </a:bodyPr>
           <a:lstStyle/>
           <a:p>
-            <a:pPr marL="0" lvl="0" indent="0" algn="l" rtl="0">
-              <a:spcBef>
-                <a:spcPts val="0"/>
-              </a:spcBef>
-              <a:spcAft>
-                <a:spcPts val="0"/>
-              </a:spcAft>
-              <a:buNone/>
-            </a:pPr>
-            <a:r>
-              <a:rPr lang="en-US"/>
-              <a:t>Every one of these is something a database solves. And they've watched the mechanism behind each problem happen in front of them, so this shouldn't read as a list of complaints about files.</a:t>
-            </a:r>
-            <a:endParaRPr/>
+            <a:r>
+              <a:t>Each one is what a database solves.</a:t>
+            </a:r>
           </a:p>
         </p:txBody>
       </p:sp>
@@ -5445,48 +5073,9 @@
           </a:bodyPr>
           <a:lstStyle/>
           <a:p>
-            <a:pPr marL="0" lvl="0" indent="0" algn="l" rtl="0">
-              <a:spcBef>
-                <a:spcPts val="0"/>
-              </a:spcBef>
-              <a:spcAft>
-                <a:spcPts val="0"/>
-              </a:spcAft>
-              <a:buNone/>
-            </a:pPr>
-            <a:r>
-              <a:rPr lang="en-US"/>
-              <a:t>Indexing, schemas, concurrency control, relationships, queries...</a:t>
-            </a:r>
-            <a:endParaRPr/>
-          </a:p>
-          <a:p>
-            <a:pPr marL="0" lvl="0" indent="0" algn="l" rtl="0">
-              <a:spcBef>
-                <a:spcPts val="0"/>
-              </a:spcBef>
-              <a:spcAft>
-                <a:spcPts val="0"/>
-              </a:spcAft>
-              <a:buNone/>
-            </a:pPr>
-            <a:endParaRPr/>
-          </a:p>
-          <a:p>
-            <a:pPr marL="0" lvl="0" indent="0" algn="l" rtl="0">
-              <a:spcBef>
-                <a:spcPts val="0"/>
-              </a:spcBef>
-              <a:spcAft>
-                <a:spcPts val="0"/>
-              </a:spcAft>
-              <a:buNone/>
-            </a:pPr>
-            <a:r>
-              <a:rPr lang="en-US"/>
-              <a:t>Let them brainstorm and they'll end up describing a database without meaning to, which is what I want, because then a database reads as engineering aimed at the exact problems we spent the hour finding. Segue into 2.2.</a:t>
-            </a:r>
-            <a:endParaRPr/>
+            <a:r>
+              <a:t>Brainstorm. Expect: indexing, schemas, concurrency control, relationships, queries. Segue to 2.2.</a:t>
+            </a:r>
           </a:p>
         </p:txBody>
       </p:sp>
@@ -5630,22 +5219,7 @@
             <a:noAutofit/>
           </a:bodyPr>
           <a:lstStyle/>
-          <a:p>
-            <a:pPr marL="0" lvl="0" indent="0" algn="l" rtl="0">
-              <a:spcBef>
-                <a:spcPts val="0"/>
-              </a:spcBef>
-              <a:spcAft>
-                <a:spcPts val="0"/>
-              </a:spcAft>
-              <a:buNone/>
-            </a:pPr>
-            <a:r>
-              <a:rPr lang="en-US"/>
-              <a:t>Quick recap. Files are simple and useful and they'll get you a long way, but once you know what's actually happening down at the byte level you can see exactly when you need something more powerful, and why.</a:t>
-            </a:r>
-            <a:endParaRPr/>
-          </a:p>
+          <a:p/>
         </p:txBody>
       </p:sp>
       <p:sp>
@@ -5788,22 +5362,7 @@
             <a:noAutofit/>
           </a:bodyPr>
           <a:lstStyle/>
-          <a:p>
-            <a:pPr marL="0" lvl="0" indent="0" algn="l" rtl="0">
-              <a:spcBef>
-                <a:spcPts val="0"/>
-              </a:spcBef>
-              <a:spcAft>
-                <a:spcPts val="0"/>
-              </a:spcAft>
-              <a:buNone/>
-            </a:pPr>
-            <a:r>
-              <a:rPr lang="en-US"/>
-              <a:t>Pull back the curtain on what they've been using since CS1.</a:t>
-            </a:r>
-            <a:endParaRPr/>
-          </a:p>
+          <a:p/>
         </p:txBody>
       </p:sp>
       <p:sp>
@@ -5946,22 +5505,7 @@
             <a:noAutofit/>
           </a:bodyPr>
           <a:lstStyle/>
-          <a:p>
-            <a:pPr marL="0" lvl="0" indent="0" algn="l" rtl="0">
-              <a:spcBef>
-                <a:spcPts val="0"/>
-              </a:spcBef>
-              <a:spcAft>
-                <a:spcPts val="0"/>
-              </a:spcAft>
-              <a:buNone/>
-            </a:pPr>
-            <a:r>
-              <a:rPr lang="en-US"/>
-              <a:t>Files have no structure of their own. Whatever structure you think is in there is a convention somebody layered on top of a pile of bytes, and that's the entire reason serialization has to exist.</a:t>
-            </a:r>
-            <a:endParaRPr/>
-          </a:p>
+          <a:p/>
         </p:txBody>
       </p:sp>
       <p:sp>
@@ -6105,20 +5649,9 @@
           </a:bodyPr>
           <a:lstStyle/>
           <a:p>
-            <a:pPr marL="0" lvl="0" indent="0" algn="l" rtl="0">
-              <a:spcBef>
-                <a:spcPts val="0"/>
-              </a:spcBef>
-              <a:spcAft>
-                <a:spcPts val="0"/>
-              </a:spcAft>
-              <a:buNone/>
-            </a:pPr>
-            <a:r>
-              <a:rPr lang="en-US"/>
-              <a:t>File descriptors are a limited resource - a process gets something like 1024 of them on most systems - so if you leak them in a long-running server you'll eventually fall over. That's the actual argument for 'with'. The tidiness argument is a distant second.</a:t>
-            </a:r>
-            <a:endParaRPr/>
+            <a:r>
+              <a:t>~1024 descriptors per process, then a long-running server falls over.</a:t>
+            </a:r>
           </a:p>
         </p:txBody>
       </p:sp>
@@ -6262,22 +5795,7 @@
             <a:noAutofit/>
           </a:bodyPr>
           <a:lstStyle/>
-          <a:p>
-            <a:pPr marL="0" lvl="0" indent="0" algn="l" rtl="0">
-              <a:spcBef>
-                <a:spcPts val="0"/>
-              </a:spcBef>
-              <a:spcAft>
-                <a:spcPts val="0"/>
-              </a:spcAft>
-              <a:buNone/>
-            </a:pPr>
-            <a:r>
-              <a:rPr lang="en-US"/>
-              <a:t>They've been told 'use with' since CS1 without anyone explaining it, so this is where they find out why. It's resource management, and the tidiness is a side effect.</a:t>
-            </a:r>
-            <a:endParaRPr/>
-          </a:p>
+          <a:p/>
         </p:txBody>
       </p:sp>
       <p:sp>
@@ -6420,22 +5938,7 @@
             <a:noAutofit/>
           </a:bodyPr>
           <a:lstStyle/>
-          <a:p>
-            <a:pPr marL="0" lvl="0" indent="0" algn="l" rtl="0">
-              <a:spcBef>
-                <a:spcPts val="0"/>
-              </a:spcBef>
-              <a:spcAft>
-                <a:spcPts val="0"/>
-              </a:spcAft>
-              <a:buNone/>
-            </a:pPr>
-            <a:r>
-              <a:rPr lang="en-US"/>
-              <a:t>They've been told 'use with' since CS1 without anyone explaining it, so this is where they find out why. It's resource management, and the tidiness is a side effect.</a:t>
-            </a:r>
-            <a:endParaRPr/>
-          </a:p>
+          <a:p/>
         </p:txBody>
       </p:sp>
       <p:sp>
@@ -6578,22 +6081,7 @@
             <a:noAutofit/>
           </a:bodyPr>
           <a:lstStyle/>
-          <a:p>
-            <a:pPr marL="0" lvl="0" indent="0" algn="l" rtl="0">
-              <a:spcBef>
-                <a:spcPts val="0"/>
-              </a:spcBef>
-              <a:spcAft>
-                <a:spcPts val="0"/>
-              </a:spcAft>
-              <a:buNone/>
-            </a:pPr>
-            <a:r>
-              <a:rPr lang="en-US"/>
-              <a:t>They've been told 'use with' since CS1 without anyone explaining it, so this is where they find out why. It's resource management, and the tidiness is a side effect.</a:t>
-            </a:r>
-            <a:endParaRPr/>
-          </a:p>
+          <a:p/>
         </p:txBody>
       </p:sp>
       <p:sp>
